--- a/cauldron_optimizer/static/ui/cauldron/backgorund.pptx
+++ b/cauldron_optimizer/static/ui/cauldron/backgorund.pptx
@@ -4,10 +4,17 @@
   <p:sldMasterIdLst>
     <p:sldMasterId id="2147483648" r:id="rId1"/>
   </p:sldMasterIdLst>
+  <p:notesMasterIdLst>
+    <p:notesMasterId r:id="rId9"/>
+  </p:notesMasterIdLst>
   <p:sldIdLst>
     <p:sldId id="256" r:id="rId2"/>
     <p:sldId id="257" r:id="rId3"/>
-    <p:sldId id="258" r:id="rId4"/>
+    <p:sldId id="261" r:id="rId4"/>
+    <p:sldId id="260" r:id="rId5"/>
+    <p:sldId id="259" r:id="rId6"/>
+    <p:sldId id="258" r:id="rId7"/>
+    <p:sldId id="263" r:id="rId8"/>
   </p:sldIdLst>
   <p:sldSz cx="12192000" cy="6858000"/>
   <p:notesSz cx="6858000" cy="9144000"/>
@@ -114,6 +121,439 @@
 </p:presentation>
 </file>
 
+<file path=ppt/notesMasters/notesMaster1.xml><?xml version="1.0" encoding="utf-8"?>
+<p:notesMaster xmlns:a="http://schemas.openxmlformats.org/drawingml/2006/main" xmlns:r="http://schemas.openxmlformats.org/officeDocument/2006/relationships" xmlns:p="http://schemas.openxmlformats.org/presentationml/2006/main">
+  <p:cSld>
+    <p:bg>
+      <p:bgRef idx="1001">
+        <a:schemeClr val="bg1"/>
+      </p:bgRef>
+    </p:bg>
+    <p:spTree>
+      <p:nvGrpSpPr>
+        <p:cNvPr id="1" name=""/>
+        <p:cNvGrpSpPr/>
+        <p:nvPr/>
+      </p:nvGrpSpPr>
+      <p:grpSpPr>
+        <a:xfrm>
+          <a:off x="0" y="0"/>
+          <a:ext cx="0" cy="0"/>
+          <a:chOff x="0" y="0"/>
+          <a:chExt cx="0" cy="0"/>
+        </a:xfrm>
+      </p:grpSpPr>
+      <p:sp>
+        <p:nvSpPr>
+          <p:cNvPr id="2" name="Header Placeholder 1"/>
+          <p:cNvSpPr>
+            <a:spLocks noGrp="1"/>
+          </p:cNvSpPr>
+          <p:nvPr>
+            <p:ph type="hdr" sz="quarter"/>
+          </p:nvPr>
+        </p:nvSpPr>
+        <p:spPr>
+          <a:xfrm>
+            <a:off x="0" y="0"/>
+            <a:ext cx="2971800" cy="458788"/>
+          </a:xfrm>
+          <a:prstGeom prst="rect">
+            <a:avLst/>
+          </a:prstGeom>
+        </p:spPr>
+        <p:txBody>
+          <a:bodyPr vert="horz" lIns="91440" tIns="45720" rIns="91440" bIns="45720" rtlCol="0"/>
+          <a:lstStyle>
+            <a:lvl1pPr algn="l">
+              <a:defRPr sz="1200"/>
+            </a:lvl1pPr>
+          </a:lstStyle>
+          <a:p>
+            <a:endParaRPr lang="en-US"/>
+          </a:p>
+        </p:txBody>
+      </p:sp>
+      <p:sp>
+        <p:nvSpPr>
+          <p:cNvPr id="3" name="Date Placeholder 2"/>
+          <p:cNvSpPr>
+            <a:spLocks noGrp="1"/>
+          </p:cNvSpPr>
+          <p:nvPr>
+            <p:ph type="dt" idx="1"/>
+          </p:nvPr>
+        </p:nvSpPr>
+        <p:spPr>
+          <a:xfrm>
+            <a:off x="3884613" y="0"/>
+            <a:ext cx="2971800" cy="458788"/>
+          </a:xfrm>
+          <a:prstGeom prst="rect">
+            <a:avLst/>
+          </a:prstGeom>
+        </p:spPr>
+        <p:txBody>
+          <a:bodyPr vert="horz" lIns="91440" tIns="45720" rIns="91440" bIns="45720" rtlCol="0"/>
+          <a:lstStyle>
+            <a:lvl1pPr algn="r">
+              <a:defRPr sz="1200"/>
+            </a:lvl1pPr>
+          </a:lstStyle>
+          <a:p>
+            <a:fld id="{3080619F-4D29-4542-9F58-47C851DB173B}" type="datetimeFigureOut">
+              <a:rPr lang="en-US" smtClean="0"/>
+              <a:t>10/12/26</a:t>
+            </a:fld>
+            <a:endParaRPr lang="en-US"/>
+          </a:p>
+        </p:txBody>
+      </p:sp>
+      <p:sp>
+        <p:nvSpPr>
+          <p:cNvPr id="4" name="Slide Image Placeholder 3"/>
+          <p:cNvSpPr>
+            <a:spLocks noGrp="1" noRot="1" noChangeAspect="1"/>
+          </p:cNvSpPr>
+          <p:nvPr>
+            <p:ph type="sldImg" idx="2"/>
+          </p:nvPr>
+        </p:nvSpPr>
+        <p:spPr>
+          <a:xfrm>
+            <a:off x="685800" y="1143000"/>
+            <a:ext cx="5486400" cy="3086100"/>
+          </a:xfrm>
+          <a:prstGeom prst="rect">
+            <a:avLst/>
+          </a:prstGeom>
+          <a:noFill/>
+          <a:ln w="12700">
+            <a:solidFill>
+              <a:prstClr val="black"/>
+            </a:solidFill>
+          </a:ln>
+        </p:spPr>
+        <p:txBody>
+          <a:bodyPr vert="horz" lIns="91440" tIns="45720" rIns="91440" bIns="45720" rtlCol="0" anchor="ctr"/>
+          <a:lstStyle/>
+          <a:p>
+            <a:endParaRPr lang="en-US"/>
+          </a:p>
+        </p:txBody>
+      </p:sp>
+      <p:sp>
+        <p:nvSpPr>
+          <p:cNvPr id="5" name="Notes Placeholder 4"/>
+          <p:cNvSpPr>
+            <a:spLocks noGrp="1"/>
+          </p:cNvSpPr>
+          <p:nvPr>
+            <p:ph type="body" sz="quarter" idx="3"/>
+          </p:nvPr>
+        </p:nvSpPr>
+        <p:spPr>
+          <a:xfrm>
+            <a:off x="685800" y="4400550"/>
+            <a:ext cx="5486400" cy="3600450"/>
+          </a:xfrm>
+          <a:prstGeom prst="rect">
+            <a:avLst/>
+          </a:prstGeom>
+        </p:spPr>
+        <p:txBody>
+          <a:bodyPr vert="horz" lIns="91440" tIns="45720" rIns="91440" bIns="45720" rtlCol="0"/>
+          <a:lstStyle/>
+          <a:p>
+            <a:pPr lvl="0"/>
+            <a:r>
+              <a:rPr lang="en-US"/>
+              <a:t>Click to edit Master text styles</a:t>
+            </a:r>
+          </a:p>
+          <a:p>
+            <a:pPr lvl="1"/>
+            <a:r>
+              <a:rPr lang="en-US"/>
+              <a:t>Second level</a:t>
+            </a:r>
+          </a:p>
+          <a:p>
+            <a:pPr lvl="2"/>
+            <a:r>
+              <a:rPr lang="en-US"/>
+              <a:t>Third level</a:t>
+            </a:r>
+          </a:p>
+          <a:p>
+            <a:pPr lvl="3"/>
+            <a:r>
+              <a:rPr lang="en-US"/>
+              <a:t>Fourth level</a:t>
+            </a:r>
+          </a:p>
+          <a:p>
+            <a:pPr lvl="4"/>
+            <a:r>
+              <a:rPr lang="en-US"/>
+              <a:t>Fifth level</a:t>
+            </a:r>
+          </a:p>
+        </p:txBody>
+      </p:sp>
+      <p:sp>
+        <p:nvSpPr>
+          <p:cNvPr id="6" name="Footer Placeholder 5"/>
+          <p:cNvSpPr>
+            <a:spLocks noGrp="1"/>
+          </p:cNvSpPr>
+          <p:nvPr>
+            <p:ph type="ftr" sz="quarter" idx="4"/>
+          </p:nvPr>
+        </p:nvSpPr>
+        <p:spPr>
+          <a:xfrm>
+            <a:off x="0" y="8685213"/>
+            <a:ext cx="2971800" cy="458787"/>
+          </a:xfrm>
+          <a:prstGeom prst="rect">
+            <a:avLst/>
+          </a:prstGeom>
+        </p:spPr>
+        <p:txBody>
+          <a:bodyPr vert="horz" lIns="91440" tIns="45720" rIns="91440" bIns="45720" rtlCol="0" anchor="b"/>
+          <a:lstStyle>
+            <a:lvl1pPr algn="l">
+              <a:defRPr sz="1200"/>
+            </a:lvl1pPr>
+          </a:lstStyle>
+          <a:p>
+            <a:endParaRPr lang="en-US"/>
+          </a:p>
+        </p:txBody>
+      </p:sp>
+      <p:sp>
+        <p:nvSpPr>
+          <p:cNvPr id="7" name="Slide Number Placeholder 6"/>
+          <p:cNvSpPr>
+            <a:spLocks noGrp="1"/>
+          </p:cNvSpPr>
+          <p:nvPr>
+            <p:ph type="sldNum" sz="quarter" idx="5"/>
+          </p:nvPr>
+        </p:nvSpPr>
+        <p:spPr>
+          <a:xfrm>
+            <a:off x="3884613" y="8685213"/>
+            <a:ext cx="2971800" cy="458787"/>
+          </a:xfrm>
+          <a:prstGeom prst="rect">
+            <a:avLst/>
+          </a:prstGeom>
+        </p:spPr>
+        <p:txBody>
+          <a:bodyPr vert="horz" lIns="91440" tIns="45720" rIns="91440" bIns="45720" rtlCol="0" anchor="b"/>
+          <a:lstStyle>
+            <a:lvl1pPr algn="r">
+              <a:defRPr sz="1200"/>
+            </a:lvl1pPr>
+          </a:lstStyle>
+          <a:p>
+            <a:fld id="{CE805584-3F1A-9B45-9C55-31209A4964E1}" type="slidenum">
+              <a:rPr lang="en-US" smtClean="0"/>
+              <a:t>‹#›</a:t>
+            </a:fld>
+            <a:endParaRPr lang="en-US"/>
+          </a:p>
+        </p:txBody>
+      </p:sp>
+    </p:spTree>
+    <p:extLst>
+      <p:ext uri="{BB962C8B-B14F-4D97-AF65-F5344CB8AC3E}">
+        <p14:creationId xmlns:p14="http://schemas.microsoft.com/office/powerpoint/2010/main" val="4143477550"/>
+      </p:ext>
+    </p:extLst>
+  </p:cSld>
+  <p:clrMap bg1="lt1" tx1="dk1" bg2="lt2" tx2="dk2" accent1="accent1" accent2="accent2" accent3="accent3" accent4="accent4" accent5="accent5" accent6="accent6" hlink="hlink" folHlink="folHlink"/>
+  <p:notesStyle>
+    <a:lvl1pPr marL="0" algn="l" defTabSz="914400" rtl="0" eaLnBrk="1" latinLnBrk="0" hangingPunct="1">
+      <a:defRPr sz="1200" kern="1200">
+        <a:solidFill>
+          <a:schemeClr val="tx1"/>
+        </a:solidFill>
+        <a:latin typeface="+mn-lt"/>
+        <a:ea typeface="+mn-ea"/>
+        <a:cs typeface="+mn-cs"/>
+      </a:defRPr>
+    </a:lvl1pPr>
+    <a:lvl2pPr marL="457200" algn="l" defTabSz="914400" rtl="0" eaLnBrk="1" latinLnBrk="0" hangingPunct="1">
+      <a:defRPr sz="1200" kern="1200">
+        <a:solidFill>
+          <a:schemeClr val="tx1"/>
+        </a:solidFill>
+        <a:latin typeface="+mn-lt"/>
+        <a:ea typeface="+mn-ea"/>
+        <a:cs typeface="+mn-cs"/>
+      </a:defRPr>
+    </a:lvl2pPr>
+    <a:lvl3pPr marL="914400" algn="l" defTabSz="914400" rtl="0" eaLnBrk="1" latinLnBrk="0" hangingPunct="1">
+      <a:defRPr sz="1200" kern="1200">
+        <a:solidFill>
+          <a:schemeClr val="tx1"/>
+        </a:solidFill>
+        <a:latin typeface="+mn-lt"/>
+        <a:ea typeface="+mn-ea"/>
+        <a:cs typeface="+mn-cs"/>
+      </a:defRPr>
+    </a:lvl3pPr>
+    <a:lvl4pPr marL="1371600" algn="l" defTabSz="914400" rtl="0" eaLnBrk="1" latinLnBrk="0" hangingPunct="1">
+      <a:defRPr sz="1200" kern="1200">
+        <a:solidFill>
+          <a:schemeClr val="tx1"/>
+        </a:solidFill>
+        <a:latin typeface="+mn-lt"/>
+        <a:ea typeface="+mn-ea"/>
+        <a:cs typeface="+mn-cs"/>
+      </a:defRPr>
+    </a:lvl4pPr>
+    <a:lvl5pPr marL="1828800" algn="l" defTabSz="914400" rtl="0" eaLnBrk="1" latinLnBrk="0" hangingPunct="1">
+      <a:defRPr sz="1200" kern="1200">
+        <a:solidFill>
+          <a:schemeClr val="tx1"/>
+        </a:solidFill>
+        <a:latin typeface="+mn-lt"/>
+        <a:ea typeface="+mn-ea"/>
+        <a:cs typeface="+mn-cs"/>
+      </a:defRPr>
+    </a:lvl5pPr>
+    <a:lvl6pPr marL="2286000" algn="l" defTabSz="914400" rtl="0" eaLnBrk="1" latinLnBrk="0" hangingPunct="1">
+      <a:defRPr sz="1200" kern="1200">
+        <a:solidFill>
+          <a:schemeClr val="tx1"/>
+        </a:solidFill>
+        <a:latin typeface="+mn-lt"/>
+        <a:ea typeface="+mn-ea"/>
+        <a:cs typeface="+mn-cs"/>
+      </a:defRPr>
+    </a:lvl6pPr>
+    <a:lvl7pPr marL="2743200" algn="l" defTabSz="914400" rtl="0" eaLnBrk="1" latinLnBrk="0" hangingPunct="1">
+      <a:defRPr sz="1200" kern="1200">
+        <a:solidFill>
+          <a:schemeClr val="tx1"/>
+        </a:solidFill>
+        <a:latin typeface="+mn-lt"/>
+        <a:ea typeface="+mn-ea"/>
+        <a:cs typeface="+mn-cs"/>
+      </a:defRPr>
+    </a:lvl7pPr>
+    <a:lvl8pPr marL="3200400" algn="l" defTabSz="914400" rtl="0" eaLnBrk="1" latinLnBrk="0" hangingPunct="1">
+      <a:defRPr sz="1200" kern="1200">
+        <a:solidFill>
+          <a:schemeClr val="tx1"/>
+        </a:solidFill>
+        <a:latin typeface="+mn-lt"/>
+        <a:ea typeface="+mn-ea"/>
+        <a:cs typeface="+mn-cs"/>
+      </a:defRPr>
+    </a:lvl8pPr>
+    <a:lvl9pPr marL="3657600" algn="l" defTabSz="914400" rtl="0" eaLnBrk="1" latinLnBrk="0" hangingPunct="1">
+      <a:defRPr sz="1200" kern="1200">
+        <a:solidFill>
+          <a:schemeClr val="tx1"/>
+        </a:solidFill>
+        <a:latin typeface="+mn-lt"/>
+        <a:ea typeface="+mn-ea"/>
+        <a:cs typeface="+mn-cs"/>
+      </a:defRPr>
+    </a:lvl9pPr>
+  </p:notesStyle>
+</p:notesMaster>
+</file>
+
+<file path=ppt/notesSlides/notesSlide1.xml><?xml version="1.0" encoding="utf-8"?>
+<p:notes xmlns:a="http://schemas.openxmlformats.org/drawingml/2006/main" xmlns:r="http://schemas.openxmlformats.org/officeDocument/2006/relationships" xmlns:p="http://schemas.openxmlformats.org/presentationml/2006/main">
+  <p:cSld>
+    <p:spTree>
+      <p:nvGrpSpPr>
+        <p:cNvPr id="1" name=""/>
+        <p:cNvGrpSpPr/>
+        <p:nvPr/>
+      </p:nvGrpSpPr>
+      <p:grpSpPr>
+        <a:xfrm>
+          <a:off x="0" y="0"/>
+          <a:ext cx="0" cy="0"/>
+          <a:chOff x="0" y="0"/>
+          <a:chExt cx="0" cy="0"/>
+        </a:xfrm>
+      </p:grpSpPr>
+      <p:sp>
+        <p:nvSpPr>
+          <p:cNvPr id="2" name="Slide Image Placeholder 1"/>
+          <p:cNvSpPr>
+            <a:spLocks noGrp="1" noRot="1" noChangeAspect="1"/>
+          </p:cNvSpPr>
+          <p:nvPr>
+            <p:ph type="sldImg"/>
+          </p:nvPr>
+        </p:nvSpPr>
+        <p:spPr/>
+      </p:sp>
+      <p:sp>
+        <p:nvSpPr>
+          <p:cNvPr id="3" name="Notes Placeholder 2"/>
+          <p:cNvSpPr>
+            <a:spLocks noGrp="1"/>
+          </p:cNvSpPr>
+          <p:nvPr>
+            <p:ph type="body" idx="1"/>
+          </p:nvPr>
+        </p:nvSpPr>
+        <p:spPr/>
+        <p:txBody>
+          <a:bodyPr/>
+          <a:lstStyle/>
+          <a:p>
+            <a:endParaRPr lang="en-US" dirty="0"/>
+          </a:p>
+        </p:txBody>
+      </p:sp>
+      <p:sp>
+        <p:nvSpPr>
+          <p:cNvPr id="4" name="Slide Number Placeholder 3"/>
+          <p:cNvSpPr>
+            <a:spLocks noGrp="1"/>
+          </p:cNvSpPr>
+          <p:nvPr>
+            <p:ph type="sldNum" sz="quarter" idx="5"/>
+          </p:nvPr>
+        </p:nvSpPr>
+        <p:spPr/>
+        <p:txBody>
+          <a:bodyPr/>
+          <a:lstStyle/>
+          <a:p>
+            <a:fld id="{CE805584-3F1A-9B45-9C55-31209A4964E1}" type="slidenum">
+              <a:rPr lang="en-US" smtClean="0"/>
+              <a:t>1</a:t>
+            </a:fld>
+            <a:endParaRPr lang="en-US"/>
+          </a:p>
+        </p:txBody>
+      </p:sp>
+    </p:spTree>
+    <p:extLst>
+      <p:ext uri="{BB962C8B-B14F-4D97-AF65-F5344CB8AC3E}">
+        <p14:creationId xmlns:p14="http://schemas.microsoft.com/office/powerpoint/2010/main" val="2159359111"/>
+      </p:ext>
+    </p:extLst>
+  </p:cSld>
+  <p:clrMapOvr>
+    <a:masterClrMapping/>
+  </p:clrMapOvr>
+</p:notes>
+</file>
+
 <file path=ppt/slideLayouts/slideLayout1.xml><?xml version="1.0" encoding="utf-8"?>
 <p:sldLayout xmlns:a="http://schemas.openxmlformats.org/drawingml/2006/main" xmlns:r="http://schemas.openxmlformats.org/officeDocument/2006/relationships" xmlns:p="http://schemas.openxmlformats.org/presentationml/2006/main" type="title" preserve="1">
   <p:cSld name="Title Slide">
@@ -261,7 +701,7 @@
           <a:p>
             <a:fld id="{578729F2-994D-A248-9D35-D25BEE8F8813}" type="datetimeFigureOut">
               <a:rPr lang="en-US" smtClean="0"/>
-              <a:t>10/10/26</a:t>
+              <a:t>10/12/26</a:t>
             </a:fld>
             <a:endParaRPr lang="en-US"/>
           </a:p>
@@ -459,7 +899,7 @@
           <a:p>
             <a:fld id="{578729F2-994D-A248-9D35-D25BEE8F8813}" type="datetimeFigureOut">
               <a:rPr lang="en-US" smtClean="0"/>
-              <a:t>10/10/26</a:t>
+              <a:t>10/12/26</a:t>
             </a:fld>
             <a:endParaRPr lang="en-US"/>
           </a:p>
@@ -667,7 +1107,7 @@
           <a:p>
             <a:fld id="{578729F2-994D-A248-9D35-D25BEE8F8813}" type="datetimeFigureOut">
               <a:rPr lang="en-US" smtClean="0"/>
-              <a:t>10/10/26</a:t>
+              <a:t>10/12/26</a:t>
             </a:fld>
             <a:endParaRPr lang="en-US"/>
           </a:p>
@@ -865,7 +1305,7 @@
           <a:p>
             <a:fld id="{578729F2-994D-A248-9D35-D25BEE8F8813}" type="datetimeFigureOut">
               <a:rPr lang="en-US" smtClean="0"/>
-              <a:t>10/10/26</a:t>
+              <a:t>10/12/26</a:t>
             </a:fld>
             <a:endParaRPr lang="en-US"/>
           </a:p>
@@ -1140,7 +1580,7 @@
           <a:p>
             <a:fld id="{578729F2-994D-A248-9D35-D25BEE8F8813}" type="datetimeFigureOut">
               <a:rPr lang="en-US" smtClean="0"/>
-              <a:t>10/10/26</a:t>
+              <a:t>10/12/26</a:t>
             </a:fld>
             <a:endParaRPr lang="en-US"/>
           </a:p>
@@ -1405,7 +1845,7 @@
           <a:p>
             <a:fld id="{578729F2-994D-A248-9D35-D25BEE8F8813}" type="datetimeFigureOut">
               <a:rPr lang="en-US" smtClean="0"/>
-              <a:t>10/10/26</a:t>
+              <a:t>10/12/26</a:t>
             </a:fld>
             <a:endParaRPr lang="en-US"/>
           </a:p>
@@ -1817,7 +2257,7 @@
           <a:p>
             <a:fld id="{578729F2-994D-A248-9D35-D25BEE8F8813}" type="datetimeFigureOut">
               <a:rPr lang="en-US" smtClean="0"/>
-              <a:t>10/10/26</a:t>
+              <a:t>10/12/26</a:t>
             </a:fld>
             <a:endParaRPr lang="en-US"/>
           </a:p>
@@ -1958,7 +2398,7 @@
           <a:p>
             <a:fld id="{578729F2-994D-A248-9D35-D25BEE8F8813}" type="datetimeFigureOut">
               <a:rPr lang="en-US" smtClean="0"/>
-              <a:t>10/10/26</a:t>
+              <a:t>10/12/26</a:t>
             </a:fld>
             <a:endParaRPr lang="en-US"/>
           </a:p>
@@ -2071,7 +2511,7 @@
           <a:p>
             <a:fld id="{578729F2-994D-A248-9D35-D25BEE8F8813}" type="datetimeFigureOut">
               <a:rPr lang="en-US" smtClean="0"/>
-              <a:t>10/10/26</a:t>
+              <a:t>10/12/26</a:t>
             </a:fld>
             <a:endParaRPr lang="en-US"/>
           </a:p>
@@ -2382,7 +2822,7 @@
           <a:p>
             <a:fld id="{578729F2-994D-A248-9D35-D25BEE8F8813}" type="datetimeFigureOut">
               <a:rPr lang="en-US" smtClean="0"/>
-              <a:t>10/10/26</a:t>
+              <a:t>10/12/26</a:t>
             </a:fld>
             <a:endParaRPr lang="en-US"/>
           </a:p>
@@ -2670,7 +3110,7 @@
           <a:p>
             <a:fld id="{578729F2-994D-A248-9D35-D25BEE8F8813}" type="datetimeFigureOut">
               <a:rPr lang="en-US" smtClean="0"/>
-              <a:t>10/10/26</a:t>
+              <a:t>10/12/26</a:t>
             </a:fld>
             <a:endParaRPr lang="en-US"/>
           </a:p>
@@ -2911,7 +3351,7 @@
           <a:p>
             <a:fld id="{578729F2-994D-A248-9D35-D25BEE8F8813}" type="datetimeFigureOut">
               <a:rPr lang="en-US" smtClean="0"/>
-              <a:t>10/10/26</a:t>
+              <a:t>10/12/26</a:t>
             </a:fld>
             <a:endParaRPr lang="en-US"/>
           </a:p>
@@ -3328,36 +3768,139 @@
           <a:chExt cx="0" cy="0"/>
         </a:xfrm>
       </p:grpSpPr>
-      <p:pic>
-        <p:nvPicPr>
-          <p:cNvPr id="2" name="Picture 1">
-            <a:extLst>
-              <a:ext uri="{FF2B5EF4-FFF2-40B4-BE49-F238E27FC236}">
-                <a16:creationId xmlns:a16="http://schemas.microsoft.com/office/drawing/2014/main" id="{68710AF9-DFB2-09CE-A507-AE3FE2CE5D66}"/>
-              </a:ext>
-            </a:extLst>
-          </p:cNvPr>
-          <p:cNvPicPr>
-            <a:picLocks noChangeAspect="1"/>
-          </p:cNvPicPr>
+      <p:grpSp>
+        <p:nvGrpSpPr>
+          <p:cNvPr id="7" name="Group 6">
+            <a:extLst>
+              <a:ext uri="{FF2B5EF4-FFF2-40B4-BE49-F238E27FC236}">
+                <a16:creationId xmlns:a16="http://schemas.microsoft.com/office/drawing/2014/main" id="{1C627810-1A83-E659-DFA0-D8507073E777}"/>
+              </a:ext>
+            </a:extLst>
+          </p:cNvPr>
+          <p:cNvGrpSpPr/>
           <p:nvPr/>
-        </p:nvPicPr>
-        <p:blipFill>
-          <a:blip r:embed="rId2"/>
-          <a:stretch>
-            <a:fillRect/>
-          </a:stretch>
-        </p:blipFill>
-        <p:spPr>
+        </p:nvGrpSpPr>
+        <p:grpSpPr>
           <a:xfrm>
-            <a:off x="528917" y="297516"/>
-            <a:ext cx="11041529" cy="6210860"/>
+            <a:off x="1" y="0"/>
+            <a:ext cx="12191999" cy="6916723"/>
+            <a:chOff x="0" y="0"/>
+            <a:chExt cx="12191999" cy="6916723"/>
           </a:xfrm>
-          <a:prstGeom prst="rect">
-            <a:avLst/>
-          </a:prstGeom>
-        </p:spPr>
-      </p:pic>
+        </p:grpSpPr>
+        <p:grpSp>
+          <p:nvGrpSpPr>
+            <p:cNvPr id="5" name="Group 4">
+              <a:extLst>
+                <a:ext uri="{FF2B5EF4-FFF2-40B4-BE49-F238E27FC236}">
+                  <a16:creationId xmlns:a16="http://schemas.microsoft.com/office/drawing/2014/main" id="{6BF999AC-BE7F-5E09-0102-04730C859391}"/>
+                </a:ext>
+              </a:extLst>
+            </p:cNvPr>
+            <p:cNvGrpSpPr/>
+            <p:nvPr/>
+          </p:nvGrpSpPr>
+          <p:grpSpPr>
+            <a:xfrm>
+              <a:off x="0" y="0"/>
+              <a:ext cx="12191999" cy="6916723"/>
+              <a:chOff x="0" y="0"/>
+              <a:chExt cx="12191999" cy="6916723"/>
+            </a:xfrm>
+          </p:grpSpPr>
+          <p:pic>
+            <p:nvPicPr>
+              <p:cNvPr id="2" name="Picture 1">
+                <a:extLst>
+                  <a:ext uri="{FF2B5EF4-FFF2-40B4-BE49-F238E27FC236}">
+                    <a16:creationId xmlns:a16="http://schemas.microsoft.com/office/drawing/2014/main" id="{68710AF9-DFB2-09CE-A507-AE3FE2CE5D66}"/>
+                  </a:ext>
+                </a:extLst>
+              </p:cNvPr>
+              <p:cNvPicPr>
+                <a:picLocks noChangeAspect="1"/>
+              </p:cNvPicPr>
+              <p:nvPr/>
+            </p:nvPicPr>
+            <p:blipFill>
+              <a:blip r:embed="rId3"/>
+              <a:stretch>
+                <a:fillRect/>
+              </a:stretch>
+            </p:blipFill>
+            <p:spPr>
+              <a:xfrm>
+                <a:off x="0" y="0"/>
+                <a:ext cx="12191999" cy="6858000"/>
+              </a:xfrm>
+              <a:prstGeom prst="rect">
+                <a:avLst/>
+              </a:prstGeom>
+            </p:spPr>
+          </p:pic>
+          <p:pic>
+            <p:nvPicPr>
+              <p:cNvPr id="3" name="Picture 2">
+                <a:extLst>
+                  <a:ext uri="{FF2B5EF4-FFF2-40B4-BE49-F238E27FC236}">
+                    <a16:creationId xmlns:a16="http://schemas.microsoft.com/office/drawing/2014/main" id="{D0C46FD7-0C9E-7136-4362-5F4FACB4DAF1}"/>
+                  </a:ext>
+                </a:extLst>
+              </p:cNvPr>
+              <p:cNvPicPr>
+                <a:picLocks noChangeAspect="1"/>
+              </p:cNvPicPr>
+              <p:nvPr/>
+            </p:nvPicPr>
+            <p:blipFill>
+              <a:blip r:embed="rId4"/>
+              <a:stretch>
+                <a:fillRect/>
+              </a:stretch>
+            </p:blipFill>
+            <p:spPr>
+              <a:xfrm>
+                <a:off x="4992830" y="5880683"/>
+                <a:ext cx="3486134" cy="1036040"/>
+              </a:xfrm>
+              <a:prstGeom prst="rect">
+                <a:avLst/>
+              </a:prstGeom>
+            </p:spPr>
+          </p:pic>
+        </p:grpSp>
+        <p:pic>
+          <p:nvPicPr>
+            <p:cNvPr id="6" name="Picture 5">
+              <a:extLst>
+                <a:ext uri="{FF2B5EF4-FFF2-40B4-BE49-F238E27FC236}">
+                  <a16:creationId xmlns:a16="http://schemas.microsoft.com/office/drawing/2014/main" id="{5E61CFB6-9590-1EA7-4468-7BED5CE9445E}"/>
+                </a:ext>
+              </a:extLst>
+            </p:cNvPr>
+            <p:cNvPicPr>
+              <a:picLocks noChangeAspect="1"/>
+            </p:cNvPicPr>
+            <p:nvPr/>
+          </p:nvPicPr>
+          <p:blipFill rotWithShape="1">
+            <a:blip r:embed="rId5"/>
+            <a:srcRect l="17745" t="2259" r="71804" b="91140"/>
+            <a:stretch>
+              <a:fillRect/>
+            </a:stretch>
+          </p:blipFill>
+          <p:spPr>
+            <a:xfrm>
+              <a:off x="2206306" y="176169"/>
+              <a:ext cx="1166070" cy="453005"/>
+            </a:xfrm>
+            <a:prstGeom prst="rect">
+              <a:avLst/>
+            </a:prstGeom>
+          </p:spPr>
+        </p:pic>
+      </p:grpSp>
     </p:spTree>
     <p:extLst>
       <p:ext uri="{BB962C8B-B14F-4D97-AF65-F5344CB8AC3E}">
@@ -3396,10 +3939,10 @@
       </p:grpSpPr>
       <p:pic>
         <p:nvPicPr>
-          <p:cNvPr id="5" name="Picture 4">
-            <a:extLst>
-              <a:ext uri="{FF2B5EF4-FFF2-40B4-BE49-F238E27FC236}">
-                <a16:creationId xmlns:a16="http://schemas.microsoft.com/office/drawing/2014/main" id="{30D6BF9A-7A43-DA77-FE28-281DDA613181}"/>
+          <p:cNvPr id="2" name="Picture 1">
+            <a:extLst>
+              <a:ext uri="{FF2B5EF4-FFF2-40B4-BE49-F238E27FC236}">
+                <a16:creationId xmlns:a16="http://schemas.microsoft.com/office/drawing/2014/main" id="{C59F97AA-E989-ACE8-4416-2D2483C96668}"/>
               </a:ext>
             </a:extLst>
           </p:cNvPr>
@@ -3410,45 +3953,15 @@
         </p:nvPicPr>
         <p:blipFill>
           <a:blip r:embed="rId2"/>
-          <a:srcRect t="85281" r="52489"/>
+          <a:srcRect b="5833"/>
           <a:stretch>
             <a:fillRect/>
           </a:stretch>
         </p:blipFill>
         <p:spPr>
           <a:xfrm>
-            <a:off x="551584" y="5772727"/>
-            <a:ext cx="5128780" cy="977784"/>
-          </a:xfrm>
-          <a:prstGeom prst="rect">
-            <a:avLst/>
-          </a:prstGeom>
-        </p:spPr>
-      </p:pic>
-      <p:pic>
-        <p:nvPicPr>
-          <p:cNvPr id="8" name="Picture 7">
-            <a:extLst>
-              <a:ext uri="{FF2B5EF4-FFF2-40B4-BE49-F238E27FC236}">
-                <a16:creationId xmlns:a16="http://schemas.microsoft.com/office/drawing/2014/main" id="{1F501AEC-F174-8F59-7AC5-0F3AA1FC8404}"/>
-              </a:ext>
-            </a:extLst>
-          </p:cNvPr>
-          <p:cNvPicPr>
-            <a:picLocks noChangeAspect="1"/>
-          </p:cNvPicPr>
-          <p:nvPr/>
-        </p:nvPicPr>
-        <p:blipFill>
-          <a:blip r:embed="rId3"/>
-          <a:stretch>
-            <a:fillRect/>
-          </a:stretch>
-        </p:blipFill>
-        <p:spPr>
-          <a:xfrm>
-            <a:off x="2209800" y="1243584"/>
-            <a:ext cx="7772400" cy="4370832"/>
+            <a:off x="0" y="0"/>
+            <a:ext cx="11841536" cy="6858000"/>
           </a:xfrm>
           <a:prstGeom prst="rect">
             <a:avLst/>
@@ -3476,6 +3989,386 @@
         <p:cNvPr id="1" name="">
           <a:extLst>
             <a:ext uri="{FF2B5EF4-FFF2-40B4-BE49-F238E27FC236}">
+              <a16:creationId xmlns:a16="http://schemas.microsoft.com/office/drawing/2014/main" id="{54605C82-9F18-6A00-3DA4-58823A54C5B5}"/>
+            </a:ext>
+          </a:extLst>
+        </p:cNvPr>
+        <p:cNvGrpSpPr/>
+        <p:nvPr/>
+      </p:nvGrpSpPr>
+      <p:grpSpPr>
+        <a:xfrm>
+          <a:off x="0" y="0"/>
+          <a:ext cx="0" cy="0"/>
+          <a:chOff x="0" y="0"/>
+          <a:chExt cx="0" cy="0"/>
+        </a:xfrm>
+      </p:grpSpPr>
+      <p:pic>
+        <p:nvPicPr>
+          <p:cNvPr id="2" name="Picture 1">
+            <a:extLst>
+              <a:ext uri="{FF2B5EF4-FFF2-40B4-BE49-F238E27FC236}">
+                <a16:creationId xmlns:a16="http://schemas.microsoft.com/office/drawing/2014/main" id="{15106D14-9DF0-DB53-EA92-AEBD7AC01E73}"/>
+              </a:ext>
+            </a:extLst>
+          </p:cNvPr>
+          <p:cNvPicPr>
+            <a:picLocks noChangeAspect="1"/>
+          </p:cNvPicPr>
+          <p:nvPr/>
+        </p:nvPicPr>
+        <p:blipFill>
+          <a:blip r:embed="rId2"/>
+          <a:stretch>
+            <a:fillRect/>
+          </a:stretch>
+        </p:blipFill>
+        <p:spPr>
+          <a:xfrm>
+            <a:off x="0" y="0"/>
+            <a:ext cx="11157358" cy="6862038"/>
+          </a:xfrm>
+          <a:prstGeom prst="rect">
+            <a:avLst/>
+          </a:prstGeom>
+        </p:spPr>
+      </p:pic>
+      <p:pic>
+        <p:nvPicPr>
+          <p:cNvPr id="3" name="Picture 2">
+            <a:extLst>
+              <a:ext uri="{FF2B5EF4-FFF2-40B4-BE49-F238E27FC236}">
+                <a16:creationId xmlns:a16="http://schemas.microsoft.com/office/drawing/2014/main" id="{5D189012-68A4-B571-2745-A37286EC3495}"/>
+              </a:ext>
+            </a:extLst>
+          </p:cNvPr>
+          <p:cNvPicPr>
+            <a:picLocks noChangeAspect="1"/>
+          </p:cNvPicPr>
+          <p:nvPr/>
+        </p:nvPicPr>
+        <p:blipFill>
+          <a:blip r:embed="rId3"/>
+          <a:srcRect b="17200"/>
+          <a:stretch>
+            <a:fillRect/>
+          </a:stretch>
+        </p:blipFill>
+        <p:spPr>
+          <a:xfrm>
+            <a:off x="7071359" y="4013200"/>
+            <a:ext cx="4076371" cy="1513840"/>
+          </a:xfrm>
+          <a:prstGeom prst="rect">
+            <a:avLst/>
+          </a:prstGeom>
+        </p:spPr>
+      </p:pic>
+      <p:pic>
+        <p:nvPicPr>
+          <p:cNvPr id="4" name="Picture 3">
+            <a:extLst>
+              <a:ext uri="{FF2B5EF4-FFF2-40B4-BE49-F238E27FC236}">
+                <a16:creationId xmlns:a16="http://schemas.microsoft.com/office/drawing/2014/main" id="{B94B1DA6-13E7-9FFA-B78D-42E1D93BDC71}"/>
+              </a:ext>
+            </a:extLst>
+          </p:cNvPr>
+          <p:cNvPicPr>
+            <a:picLocks noChangeAspect="1"/>
+          </p:cNvPicPr>
+          <p:nvPr/>
+        </p:nvPicPr>
+        <p:blipFill>
+          <a:blip r:embed="rId4"/>
+          <a:stretch>
+            <a:fillRect/>
+          </a:stretch>
+        </p:blipFill>
+        <p:spPr>
+          <a:xfrm>
+            <a:off x="7426960" y="3144668"/>
+            <a:ext cx="3329940" cy="1399392"/>
+          </a:xfrm>
+          <a:prstGeom prst="rect">
+            <a:avLst/>
+          </a:prstGeom>
+        </p:spPr>
+      </p:pic>
+      <p:pic>
+        <p:nvPicPr>
+          <p:cNvPr id="5" name="Picture 4">
+            <a:extLst>
+              <a:ext uri="{FF2B5EF4-FFF2-40B4-BE49-F238E27FC236}">
+                <a16:creationId xmlns:a16="http://schemas.microsoft.com/office/drawing/2014/main" id="{3B93DF21-A6C9-86D6-E721-E547B6A5E677}"/>
+              </a:ext>
+            </a:extLst>
+          </p:cNvPr>
+          <p:cNvPicPr>
+            <a:picLocks noChangeAspect="1"/>
+          </p:cNvPicPr>
+          <p:nvPr/>
+        </p:nvPicPr>
+        <p:blipFill>
+          <a:blip r:embed="rId5"/>
+          <a:stretch>
+            <a:fillRect/>
+          </a:stretch>
+        </p:blipFill>
+        <p:spPr>
+          <a:xfrm>
+            <a:off x="8693150" y="180340"/>
+            <a:ext cx="1070610" cy="439420"/>
+          </a:xfrm>
+          <a:prstGeom prst="rect">
+            <a:avLst/>
+          </a:prstGeom>
+        </p:spPr>
+      </p:pic>
+      <p:pic>
+        <p:nvPicPr>
+          <p:cNvPr id="6" name="Picture 5">
+            <a:extLst>
+              <a:ext uri="{FF2B5EF4-FFF2-40B4-BE49-F238E27FC236}">
+                <a16:creationId xmlns:a16="http://schemas.microsoft.com/office/drawing/2014/main" id="{1437CCBB-1601-47AA-E44B-D30C78EE41FE}"/>
+              </a:ext>
+            </a:extLst>
+          </p:cNvPr>
+          <p:cNvPicPr>
+            <a:picLocks noChangeAspect="1"/>
+          </p:cNvPicPr>
+          <p:nvPr/>
+        </p:nvPicPr>
+        <p:blipFill>
+          <a:blip r:embed="rId6"/>
+          <a:stretch>
+            <a:fillRect/>
+          </a:stretch>
+        </p:blipFill>
+        <p:spPr>
+          <a:xfrm>
+            <a:off x="7894320" y="5659750"/>
+            <a:ext cx="2933700" cy="356526"/>
+          </a:xfrm>
+          <a:prstGeom prst="rect">
+            <a:avLst/>
+          </a:prstGeom>
+        </p:spPr>
+      </p:pic>
+      <p:pic>
+        <p:nvPicPr>
+          <p:cNvPr id="7" name="Picture 6">
+            <a:extLst>
+              <a:ext uri="{FF2B5EF4-FFF2-40B4-BE49-F238E27FC236}">
+                <a16:creationId xmlns:a16="http://schemas.microsoft.com/office/drawing/2014/main" id="{4C2D70C4-44AF-BFEE-7613-D563486447AD}"/>
+              </a:ext>
+            </a:extLst>
+          </p:cNvPr>
+          <p:cNvPicPr>
+            <a:picLocks noChangeAspect="1"/>
+          </p:cNvPicPr>
+          <p:nvPr/>
+        </p:nvPicPr>
+        <p:blipFill>
+          <a:blip r:embed="rId6"/>
+          <a:stretch>
+            <a:fillRect/>
+          </a:stretch>
+        </p:blipFill>
+        <p:spPr>
+          <a:xfrm rot="10800000">
+            <a:off x="7894320" y="5527040"/>
+            <a:ext cx="2933700" cy="356526"/>
+          </a:xfrm>
+          <a:prstGeom prst="rect">
+            <a:avLst/>
+          </a:prstGeom>
+        </p:spPr>
+      </p:pic>
+    </p:spTree>
+    <p:extLst>
+      <p:ext uri="{BB962C8B-B14F-4D97-AF65-F5344CB8AC3E}">
+        <p14:creationId xmlns:p14="http://schemas.microsoft.com/office/powerpoint/2010/main" val="3477147180"/>
+      </p:ext>
+    </p:extLst>
+  </p:cSld>
+  <p:clrMapOvr>
+    <a:masterClrMapping/>
+  </p:clrMapOvr>
+</p:sld>
+</file>
+
+<file path=ppt/slides/slide4.xml><?xml version="1.0" encoding="utf-8"?>
+<p:sld xmlns:a="http://schemas.openxmlformats.org/drawingml/2006/main" xmlns:r="http://schemas.openxmlformats.org/officeDocument/2006/relationships" xmlns:p="http://schemas.openxmlformats.org/presentationml/2006/main">
+  <p:cSld>
+    <p:spTree>
+      <p:nvGrpSpPr>
+        <p:cNvPr id="1" name="">
+          <a:extLst>
+            <a:ext uri="{FF2B5EF4-FFF2-40B4-BE49-F238E27FC236}">
+              <a16:creationId xmlns:a16="http://schemas.microsoft.com/office/drawing/2014/main" id="{CC0FE435-9A20-8118-4118-4950F578812E}"/>
+            </a:ext>
+          </a:extLst>
+        </p:cNvPr>
+        <p:cNvGrpSpPr/>
+        <p:nvPr/>
+      </p:nvGrpSpPr>
+      <p:grpSpPr>
+        <a:xfrm>
+          <a:off x="0" y="0"/>
+          <a:ext cx="0" cy="0"/>
+          <a:chOff x="0" y="0"/>
+          <a:chExt cx="0" cy="0"/>
+        </a:xfrm>
+      </p:grpSpPr>
+      <p:pic>
+        <p:nvPicPr>
+          <p:cNvPr id="2" name="Picture 1">
+            <a:extLst>
+              <a:ext uri="{FF2B5EF4-FFF2-40B4-BE49-F238E27FC236}">
+                <a16:creationId xmlns:a16="http://schemas.microsoft.com/office/drawing/2014/main" id="{9A79417B-0DDF-B5EC-67D2-E0141B4251C3}"/>
+              </a:ext>
+            </a:extLst>
+          </p:cNvPr>
+          <p:cNvPicPr>
+            <a:picLocks noChangeAspect="1"/>
+          </p:cNvPicPr>
+          <p:nvPr/>
+        </p:nvPicPr>
+        <p:blipFill rotWithShape="1">
+          <a:blip r:embed="rId2"/>
+          <a:srcRect l="17745" t="2259" r="71804" b="91140"/>
+          <a:stretch>
+            <a:fillRect/>
+          </a:stretch>
+        </p:blipFill>
+        <p:spPr>
+          <a:xfrm>
+            <a:off x="2902592" y="151002"/>
+            <a:ext cx="1166070" cy="453005"/>
+          </a:xfrm>
+          <a:prstGeom prst="rect">
+            <a:avLst/>
+          </a:prstGeom>
+        </p:spPr>
+      </p:pic>
+      <p:pic>
+        <p:nvPicPr>
+          <p:cNvPr id="13" name="Picture 12">
+            <a:extLst>
+              <a:ext uri="{FF2B5EF4-FFF2-40B4-BE49-F238E27FC236}">
+                <a16:creationId xmlns:a16="http://schemas.microsoft.com/office/drawing/2014/main" id="{C2F15C1F-1DF4-6F4E-1FA4-5A25EFBFD367}"/>
+              </a:ext>
+            </a:extLst>
+          </p:cNvPr>
+          <p:cNvPicPr>
+            <a:picLocks noChangeAspect="1"/>
+          </p:cNvPicPr>
+          <p:nvPr/>
+        </p:nvPicPr>
+        <p:blipFill>
+          <a:blip r:embed="rId3"/>
+          <a:stretch>
+            <a:fillRect/>
+          </a:stretch>
+        </p:blipFill>
+        <p:spPr>
+          <a:xfrm>
+            <a:off x="269240" y="925392"/>
+            <a:ext cx="7772400" cy="4783695"/>
+          </a:xfrm>
+          <a:prstGeom prst="rect">
+            <a:avLst/>
+          </a:prstGeom>
+        </p:spPr>
+      </p:pic>
+    </p:spTree>
+    <p:extLst>
+      <p:ext uri="{BB962C8B-B14F-4D97-AF65-F5344CB8AC3E}">
+        <p14:creationId xmlns:p14="http://schemas.microsoft.com/office/powerpoint/2010/main" val="2798658347"/>
+      </p:ext>
+    </p:extLst>
+  </p:cSld>
+  <p:clrMapOvr>
+    <a:masterClrMapping/>
+  </p:clrMapOvr>
+</p:sld>
+</file>
+
+<file path=ppt/slides/slide5.xml><?xml version="1.0" encoding="utf-8"?>
+<p:sld xmlns:a="http://schemas.openxmlformats.org/drawingml/2006/main" xmlns:r="http://schemas.openxmlformats.org/officeDocument/2006/relationships" xmlns:p="http://schemas.openxmlformats.org/presentationml/2006/main">
+  <p:cSld>
+    <p:spTree>
+      <p:nvGrpSpPr>
+        <p:cNvPr id="1" name="">
+          <a:extLst>
+            <a:ext uri="{FF2B5EF4-FFF2-40B4-BE49-F238E27FC236}">
+              <a16:creationId xmlns:a16="http://schemas.microsoft.com/office/drawing/2014/main" id="{BC9236C9-E1BD-D098-D941-BC5594C56BA9}"/>
+            </a:ext>
+          </a:extLst>
+        </p:cNvPr>
+        <p:cNvGrpSpPr/>
+        <p:nvPr/>
+      </p:nvGrpSpPr>
+      <p:grpSpPr>
+        <a:xfrm>
+          <a:off x="0" y="0"/>
+          <a:ext cx="0" cy="0"/>
+          <a:chOff x="0" y="0"/>
+          <a:chExt cx="0" cy="0"/>
+        </a:xfrm>
+      </p:grpSpPr>
+      <p:pic>
+        <p:nvPicPr>
+          <p:cNvPr id="4" name="Picture 3">
+            <a:extLst>
+              <a:ext uri="{FF2B5EF4-FFF2-40B4-BE49-F238E27FC236}">
+                <a16:creationId xmlns:a16="http://schemas.microsoft.com/office/drawing/2014/main" id="{60AF805E-FFDD-F2B1-748A-0AD56CF588F7}"/>
+              </a:ext>
+            </a:extLst>
+          </p:cNvPr>
+          <p:cNvPicPr>
+            <a:picLocks noChangeAspect="1"/>
+          </p:cNvPicPr>
+          <p:nvPr/>
+        </p:nvPicPr>
+        <p:blipFill>
+          <a:blip r:embed="rId2"/>
+          <a:stretch>
+            <a:fillRect/>
+          </a:stretch>
+        </p:blipFill>
+        <p:spPr>
+          <a:xfrm>
+            <a:off x="4514850" y="2959100"/>
+            <a:ext cx="3162300" cy="939800"/>
+          </a:xfrm>
+          <a:prstGeom prst="rect">
+            <a:avLst/>
+          </a:prstGeom>
+        </p:spPr>
+      </p:pic>
+    </p:spTree>
+    <p:extLst>
+      <p:ext uri="{BB962C8B-B14F-4D97-AF65-F5344CB8AC3E}">
+        <p14:creationId xmlns:p14="http://schemas.microsoft.com/office/powerpoint/2010/main" val="3364208611"/>
+      </p:ext>
+    </p:extLst>
+  </p:cSld>
+  <p:clrMapOvr>
+    <a:masterClrMapping/>
+  </p:clrMapOvr>
+</p:sld>
+</file>
+
+<file path=ppt/slides/slide6.xml><?xml version="1.0" encoding="utf-8"?>
+<p:sld xmlns:a="http://schemas.openxmlformats.org/drawingml/2006/main" xmlns:r="http://schemas.openxmlformats.org/officeDocument/2006/relationships" xmlns:p="http://schemas.openxmlformats.org/presentationml/2006/main">
+  <p:cSld>
+    <p:spTree>
+      <p:nvGrpSpPr>
+        <p:cNvPr id="1" name="">
+          <a:extLst>
+            <a:ext uri="{FF2B5EF4-FFF2-40B4-BE49-F238E27FC236}">
               <a16:creationId xmlns:a16="http://schemas.microsoft.com/office/drawing/2014/main" id="{5C71533F-4B32-4B4D-787A-5A4D37918DAD}"/>
             </a:ext>
           </a:extLst>
@@ -3493,10 +4386,10 @@
       </p:grpSpPr>
       <p:pic>
         <p:nvPicPr>
-          <p:cNvPr id="5" name="Picture 4">
-            <a:extLst>
-              <a:ext uri="{FF2B5EF4-FFF2-40B4-BE49-F238E27FC236}">
-                <a16:creationId xmlns:a16="http://schemas.microsoft.com/office/drawing/2014/main" id="{AB25F4CF-1131-8557-665B-555EA58D3399}"/>
+          <p:cNvPr id="11" name="Picture 10">
+            <a:extLst>
+              <a:ext uri="{FF2B5EF4-FFF2-40B4-BE49-F238E27FC236}">
+                <a16:creationId xmlns:a16="http://schemas.microsoft.com/office/drawing/2014/main" id="{98190E05-3926-6EB7-ADC6-84B8E3FE1A76}"/>
               </a:ext>
             </a:extLst>
           </p:cNvPr>
@@ -3507,46 +4400,14 @@
         </p:nvPicPr>
         <p:blipFill>
           <a:blip r:embed="rId2"/>
-          <a:srcRect l="63768" t="95102"/>
           <a:stretch>
             <a:fillRect/>
           </a:stretch>
         </p:blipFill>
         <p:spPr>
           <a:xfrm>
-            <a:off x="7407563" y="6317673"/>
-            <a:ext cx="3911225" cy="325350"/>
-          </a:xfrm>
-          <a:prstGeom prst="rect">
-            <a:avLst/>
-          </a:prstGeom>
-        </p:spPr>
-      </p:pic>
-      <p:pic>
-        <p:nvPicPr>
-          <p:cNvPr id="6" name="Picture 5">
-            <a:extLst>
-              <a:ext uri="{FF2B5EF4-FFF2-40B4-BE49-F238E27FC236}">
-                <a16:creationId xmlns:a16="http://schemas.microsoft.com/office/drawing/2014/main" id="{4AC28EA2-9799-6FE5-206A-04F96BBBFECD}"/>
-              </a:ext>
-            </a:extLst>
-          </p:cNvPr>
-          <p:cNvPicPr>
-            <a:picLocks noChangeAspect="1"/>
-          </p:cNvPicPr>
-          <p:nvPr/>
-        </p:nvPicPr>
-        <p:blipFill>
-          <a:blip r:embed="rId2"/>
-          <a:srcRect t="85281" r="52489"/>
-          <a:stretch>
-            <a:fillRect/>
-          </a:stretch>
-        </p:blipFill>
-        <p:spPr>
-          <a:xfrm>
-            <a:off x="523875" y="5052291"/>
-            <a:ext cx="5128780" cy="977784"/>
+            <a:off x="1574800" y="1087120"/>
+            <a:ext cx="12297142" cy="6981190"/>
           </a:xfrm>
           <a:prstGeom prst="rect">
             <a:avLst/>
@@ -3557,6 +4418,99 @@
     <p:extLst>
       <p:ext uri="{BB962C8B-B14F-4D97-AF65-F5344CB8AC3E}">
         <p14:creationId xmlns:p14="http://schemas.microsoft.com/office/powerpoint/2010/main" val="1412555687"/>
+      </p:ext>
+    </p:extLst>
+  </p:cSld>
+  <p:clrMapOvr>
+    <a:masterClrMapping/>
+  </p:clrMapOvr>
+</p:sld>
+</file>
+
+<file path=ppt/slides/slide7.xml><?xml version="1.0" encoding="utf-8"?>
+<p:sld xmlns:a="http://schemas.openxmlformats.org/drawingml/2006/main" xmlns:r="http://schemas.openxmlformats.org/officeDocument/2006/relationships" xmlns:p="http://schemas.openxmlformats.org/presentationml/2006/main">
+  <p:cSld>
+    <p:spTree>
+      <p:nvGrpSpPr>
+        <p:cNvPr id="1" name=""/>
+        <p:cNvGrpSpPr/>
+        <p:nvPr/>
+      </p:nvGrpSpPr>
+      <p:grpSpPr>
+        <a:xfrm>
+          <a:off x="0" y="0"/>
+          <a:ext cx="0" cy="0"/>
+          <a:chOff x="0" y="0"/>
+          <a:chExt cx="0" cy="0"/>
+        </a:xfrm>
+      </p:grpSpPr>
+      <p:sp>
+        <p:nvSpPr>
+          <p:cNvPr id="3" name="TextBox 2">
+            <a:extLst>
+              <a:ext uri="{FF2B5EF4-FFF2-40B4-BE49-F238E27FC236}">
+                <a16:creationId xmlns:a16="http://schemas.microsoft.com/office/drawing/2014/main" id="{56C70529-B833-517D-A04D-8368168F4CA8}"/>
+              </a:ext>
+            </a:extLst>
+          </p:cNvPr>
+          <p:cNvSpPr txBox="1"/>
+          <p:nvPr/>
+        </p:nvSpPr>
+        <p:spPr>
+          <a:xfrm>
+            <a:off x="3048000" y="3244334"/>
+            <a:ext cx="6096000" cy="369332"/>
+          </a:xfrm>
+          <a:prstGeom prst="rect">
+            <a:avLst/>
+          </a:prstGeom>
+          <a:noFill/>
+        </p:spPr>
+        <p:txBody>
+          <a:bodyPr wrap="square">
+            <a:spAutoFit/>
+          </a:bodyPr>
+          <a:lstStyle/>
+          <a:p>
+            <a:endParaRPr lang="en-US"/>
+          </a:p>
+        </p:txBody>
+      </p:sp>
+      <p:pic>
+        <p:nvPicPr>
+          <p:cNvPr id="6" name="Picture 5">
+            <a:extLst>
+              <a:ext uri="{FF2B5EF4-FFF2-40B4-BE49-F238E27FC236}">
+                <a16:creationId xmlns:a16="http://schemas.microsoft.com/office/drawing/2014/main" id="{87737867-EAC0-5038-95F8-C3A6E9B94D82}"/>
+              </a:ext>
+            </a:extLst>
+          </p:cNvPr>
+          <p:cNvPicPr>
+            <a:picLocks noChangeAspect="1"/>
+          </p:cNvPicPr>
+          <p:nvPr/>
+        </p:nvPicPr>
+        <p:blipFill>
+          <a:blip r:embed="rId2"/>
+          <a:srcRect l="5582" t="4586" r="1767" b="3709"/>
+          <a:stretch>
+            <a:fillRect/>
+          </a:stretch>
+        </p:blipFill>
+        <p:spPr>
+          <a:xfrm>
+            <a:off x="0" y="0"/>
+            <a:ext cx="11054080" cy="6881054"/>
+          </a:xfrm>
+          <a:prstGeom prst="rect">
+            <a:avLst/>
+          </a:prstGeom>
+        </p:spPr>
+      </p:pic>
+    </p:spTree>
+    <p:extLst>
+      <p:ext uri="{BB962C8B-B14F-4D97-AF65-F5344CB8AC3E}">
+        <p14:creationId xmlns:p14="http://schemas.microsoft.com/office/powerpoint/2010/main" val="2532002802"/>
       </p:ext>
     </p:extLst>
   </p:cSld>
@@ -3879,4 +4833,319 @@
     </a:ext>
   </a:extLst>
 </a:theme>
+</file>
+
+<file path=ppt/theme/theme2.xml><?xml version="1.0" encoding="utf-8"?>
+<a:theme xmlns:a="http://schemas.openxmlformats.org/drawingml/2006/main" name="Office Theme">
+  <a:themeElements>
+    <a:clrScheme name="Office">
+      <a:dk1>
+        <a:sysClr val="windowText" lastClr="000000"/>
+      </a:dk1>
+      <a:lt1>
+        <a:sysClr val="window" lastClr="FFFFFF"/>
+      </a:lt1>
+      <a:dk2>
+        <a:srgbClr val="0E2841"/>
+      </a:dk2>
+      <a:lt2>
+        <a:srgbClr val="E8E8E8"/>
+      </a:lt2>
+      <a:accent1>
+        <a:srgbClr val="156082"/>
+      </a:accent1>
+      <a:accent2>
+        <a:srgbClr val="E97132"/>
+      </a:accent2>
+      <a:accent3>
+        <a:srgbClr val="196B24"/>
+      </a:accent3>
+      <a:accent4>
+        <a:srgbClr val="0F9ED5"/>
+      </a:accent4>
+      <a:accent5>
+        <a:srgbClr val="A02B93"/>
+      </a:accent5>
+      <a:accent6>
+        <a:srgbClr val="4EA72E"/>
+      </a:accent6>
+      <a:hlink>
+        <a:srgbClr val="467886"/>
+      </a:hlink>
+      <a:folHlink>
+        <a:srgbClr val="96607D"/>
+      </a:folHlink>
+    </a:clrScheme>
+    <a:fontScheme name="Office">
+      <a:majorFont>
+        <a:latin typeface="Aptos Display" panose="02110004020202020204"/>
+        <a:ea typeface=""/>
+        <a:cs typeface=""/>
+        <a:font script="Jpan" typeface="游ゴシック Light"/>
+        <a:font script="Hang" typeface="맑은 고딕"/>
+        <a:font script="Hans" typeface="等线 Light"/>
+        <a:font script="Hant" typeface="新細明體"/>
+        <a:font script="Arab" typeface="Times New Roman"/>
+        <a:font script="Hebr" typeface="Times New Roman"/>
+        <a:font script="Thai" typeface="Angsana New"/>
+        <a:font script="Ethi" typeface="Nyala"/>
+        <a:font script="Beng" typeface="Vrinda"/>
+        <a:font script="Gujr" typeface="Shruti"/>
+        <a:font script="Khmr" typeface="MoolBoran"/>
+        <a:font script="Knda" typeface="Tunga"/>
+        <a:font script="Guru" typeface="Raavi"/>
+        <a:font script="Cans" typeface="Euphemia"/>
+        <a:font script="Cher" typeface="Plantagenet Cherokee"/>
+        <a:font script="Yiii" typeface="Microsoft Yi Baiti"/>
+        <a:font script="Tibt" typeface="Microsoft Himalaya"/>
+        <a:font script="Thaa" typeface="MV Boli"/>
+        <a:font script="Deva" typeface="Mangal"/>
+        <a:font script="Telu" typeface="Gautami"/>
+        <a:font script="Taml" typeface="Latha"/>
+        <a:font script="Syrc" typeface="Estrangelo Edessa"/>
+        <a:font script="Orya" typeface="Kalinga"/>
+        <a:font script="Mlym" typeface="Kartika"/>
+        <a:font script="Laoo" typeface="DokChampa"/>
+        <a:font script="Sinh" typeface="Iskoola Pota"/>
+        <a:font script="Mong" typeface="Mongolian Baiti"/>
+        <a:font script="Viet" typeface="Times New Roman"/>
+        <a:font script="Uigh" typeface="Microsoft Uighur"/>
+        <a:font script="Geor" typeface="Sylfaen"/>
+        <a:font script="Armn" typeface="Arial"/>
+        <a:font script="Bugi" typeface="Leelawadee UI"/>
+        <a:font script="Bopo" typeface="Microsoft JhengHei"/>
+        <a:font script="Java" typeface="Javanese Text"/>
+        <a:font script="Lisu" typeface="Segoe UI"/>
+        <a:font script="Mymr" typeface="Myanmar Text"/>
+        <a:font script="Nkoo" typeface="Ebrima"/>
+        <a:font script="Olck" typeface="Nirmala UI"/>
+        <a:font script="Osma" typeface="Ebrima"/>
+        <a:font script="Phag" typeface="Phagspa"/>
+        <a:font script="Syrn" typeface="Estrangelo Edessa"/>
+        <a:font script="Syrj" typeface="Estrangelo Edessa"/>
+        <a:font script="Syre" typeface="Estrangelo Edessa"/>
+        <a:font script="Sora" typeface="Nirmala UI"/>
+        <a:font script="Tale" typeface="Microsoft Tai Le"/>
+        <a:font script="Talu" typeface="Microsoft New Tai Lue"/>
+        <a:font script="Tfng" typeface="Ebrima"/>
+      </a:majorFont>
+      <a:minorFont>
+        <a:latin typeface="Aptos" panose="02110004020202020204"/>
+        <a:ea typeface=""/>
+        <a:cs typeface=""/>
+        <a:font script="Jpan" typeface="游ゴシック"/>
+        <a:font script="Hang" typeface="맑은 고딕"/>
+        <a:font script="Hans" typeface="等线"/>
+        <a:font script="Hant" typeface="新細明體"/>
+        <a:font script="Arab" typeface="Arial"/>
+        <a:font script="Hebr" typeface="Arial"/>
+        <a:font script="Thai" typeface="Cordia New"/>
+        <a:font script="Ethi" typeface="Nyala"/>
+        <a:font script="Beng" typeface="Vrinda"/>
+        <a:font script="Gujr" typeface="Shruti"/>
+        <a:font script="Khmr" typeface="DaunPenh"/>
+        <a:font script="Knda" typeface="Tunga"/>
+        <a:font script="Guru" typeface="Raavi"/>
+        <a:font script="Cans" typeface="Euphemia"/>
+        <a:font script="Cher" typeface="Plantagenet Cherokee"/>
+        <a:font script="Yiii" typeface="Microsoft Yi Baiti"/>
+        <a:font script="Tibt" typeface="Microsoft Himalaya"/>
+        <a:font script="Thaa" typeface="MV Boli"/>
+        <a:font script="Deva" typeface="Mangal"/>
+        <a:font script="Telu" typeface="Gautami"/>
+        <a:font script="Taml" typeface="Latha"/>
+        <a:font script="Syrc" typeface="Estrangelo Edessa"/>
+        <a:font script="Orya" typeface="Kalinga"/>
+        <a:font script="Mlym" typeface="Kartika"/>
+        <a:font script="Laoo" typeface="DokChampa"/>
+        <a:font script="Sinh" typeface="Iskoola Pota"/>
+        <a:font script="Mong" typeface="Mongolian Baiti"/>
+        <a:font script="Viet" typeface="Arial"/>
+        <a:font script="Uigh" typeface="Microsoft Uighur"/>
+        <a:font script="Geor" typeface="Sylfaen"/>
+        <a:font script="Armn" typeface="Arial"/>
+        <a:font script="Bugi" typeface="Leelawadee UI"/>
+        <a:font script="Bopo" typeface="Microsoft JhengHei"/>
+        <a:font script="Java" typeface="Javanese Text"/>
+        <a:font script="Lisu" typeface="Segoe UI"/>
+        <a:font script="Mymr" typeface="Myanmar Text"/>
+        <a:font script="Nkoo" typeface="Ebrima"/>
+        <a:font script="Olck" typeface="Nirmala UI"/>
+        <a:font script="Osma" typeface="Ebrima"/>
+        <a:font script="Phag" typeface="Phagspa"/>
+        <a:font script="Syrn" typeface="Estrangelo Edessa"/>
+        <a:font script="Syrj" typeface="Estrangelo Edessa"/>
+        <a:font script="Syre" typeface="Estrangelo Edessa"/>
+        <a:font script="Sora" typeface="Nirmala UI"/>
+        <a:font script="Tale" typeface="Microsoft Tai Le"/>
+        <a:font script="Talu" typeface="Microsoft New Tai Lue"/>
+        <a:font script="Tfng" typeface="Ebrima"/>
+      </a:minorFont>
+    </a:fontScheme>
+    <a:fmtScheme name="Office">
+      <a:fillStyleLst>
+        <a:solidFill>
+          <a:schemeClr val="phClr"/>
+        </a:solidFill>
+        <a:gradFill rotWithShape="1">
+          <a:gsLst>
+            <a:gs pos="0">
+              <a:schemeClr val="phClr">
+                <a:lumMod val="110000"/>
+                <a:satMod val="105000"/>
+                <a:tint val="67000"/>
+              </a:schemeClr>
+            </a:gs>
+            <a:gs pos="50000">
+              <a:schemeClr val="phClr">
+                <a:lumMod val="105000"/>
+                <a:satMod val="103000"/>
+                <a:tint val="73000"/>
+              </a:schemeClr>
+            </a:gs>
+            <a:gs pos="100000">
+              <a:schemeClr val="phClr">
+                <a:lumMod val="105000"/>
+                <a:satMod val="109000"/>
+                <a:tint val="81000"/>
+              </a:schemeClr>
+            </a:gs>
+          </a:gsLst>
+          <a:lin ang="5400000" scaled="0"/>
+        </a:gradFill>
+        <a:gradFill rotWithShape="1">
+          <a:gsLst>
+            <a:gs pos="0">
+              <a:schemeClr val="phClr">
+                <a:satMod val="103000"/>
+                <a:lumMod val="102000"/>
+                <a:tint val="94000"/>
+              </a:schemeClr>
+            </a:gs>
+            <a:gs pos="50000">
+              <a:schemeClr val="phClr">
+                <a:satMod val="110000"/>
+                <a:lumMod val="100000"/>
+                <a:shade val="100000"/>
+              </a:schemeClr>
+            </a:gs>
+            <a:gs pos="100000">
+              <a:schemeClr val="phClr">
+                <a:lumMod val="99000"/>
+                <a:satMod val="120000"/>
+                <a:shade val="78000"/>
+              </a:schemeClr>
+            </a:gs>
+          </a:gsLst>
+          <a:lin ang="5400000" scaled="0"/>
+        </a:gradFill>
+      </a:fillStyleLst>
+      <a:lnStyleLst>
+        <a:ln w="12700" cap="flat" cmpd="sng" algn="ctr">
+          <a:solidFill>
+            <a:schemeClr val="phClr"/>
+          </a:solidFill>
+          <a:prstDash val="solid"/>
+          <a:miter lim="800000"/>
+        </a:ln>
+        <a:ln w="19050" cap="flat" cmpd="sng" algn="ctr">
+          <a:solidFill>
+            <a:schemeClr val="phClr"/>
+          </a:solidFill>
+          <a:prstDash val="solid"/>
+          <a:miter lim="800000"/>
+        </a:ln>
+        <a:ln w="25400" cap="flat" cmpd="sng" algn="ctr">
+          <a:solidFill>
+            <a:schemeClr val="phClr"/>
+          </a:solidFill>
+          <a:prstDash val="solid"/>
+          <a:miter lim="800000"/>
+        </a:ln>
+      </a:lnStyleLst>
+      <a:effectStyleLst>
+        <a:effectStyle>
+          <a:effectLst/>
+        </a:effectStyle>
+        <a:effectStyle>
+          <a:effectLst/>
+        </a:effectStyle>
+        <a:effectStyle>
+          <a:effectLst>
+            <a:outerShdw blurRad="57150" dist="19050" dir="5400000" algn="ctr" rotWithShape="0">
+              <a:srgbClr val="000000">
+                <a:alpha val="63000"/>
+              </a:srgbClr>
+            </a:outerShdw>
+          </a:effectLst>
+        </a:effectStyle>
+      </a:effectStyleLst>
+      <a:bgFillStyleLst>
+        <a:solidFill>
+          <a:schemeClr val="phClr"/>
+        </a:solidFill>
+        <a:solidFill>
+          <a:schemeClr val="phClr">
+            <a:tint val="95000"/>
+            <a:satMod val="170000"/>
+          </a:schemeClr>
+        </a:solidFill>
+        <a:gradFill rotWithShape="1">
+          <a:gsLst>
+            <a:gs pos="0">
+              <a:schemeClr val="phClr">
+                <a:tint val="93000"/>
+                <a:satMod val="150000"/>
+                <a:shade val="98000"/>
+                <a:lumMod val="102000"/>
+              </a:schemeClr>
+            </a:gs>
+            <a:gs pos="50000">
+              <a:schemeClr val="phClr">
+                <a:tint val="98000"/>
+                <a:satMod val="130000"/>
+                <a:shade val="90000"/>
+                <a:lumMod val="103000"/>
+              </a:schemeClr>
+            </a:gs>
+            <a:gs pos="100000">
+              <a:schemeClr val="phClr">
+                <a:shade val="63000"/>
+                <a:satMod val="120000"/>
+              </a:schemeClr>
+            </a:gs>
+          </a:gsLst>
+          <a:lin ang="5400000" scaled="0"/>
+        </a:gradFill>
+      </a:bgFillStyleLst>
+    </a:fmtScheme>
+  </a:themeElements>
+  <a:objectDefaults>
+    <a:lnDef>
+      <a:spPr/>
+      <a:bodyPr/>
+      <a:lstStyle/>
+      <a:style>
+        <a:lnRef idx="2">
+          <a:schemeClr val="accent1"/>
+        </a:lnRef>
+        <a:fillRef idx="0">
+          <a:schemeClr val="accent1"/>
+        </a:fillRef>
+        <a:effectRef idx="1">
+          <a:schemeClr val="accent1"/>
+        </a:effectRef>
+        <a:fontRef idx="minor">
+          <a:schemeClr val="tx1"/>
+        </a:fontRef>
+      </a:style>
+    </a:lnDef>
+  </a:objectDefaults>
+  <a:extraClrSchemeLst/>
+  <a:extLst>
+    <a:ext uri="{05A4C25C-085E-4340-85A3-A5531E510DB2}">
+      <thm15:themeFamily xmlns:thm15="http://schemas.microsoft.com/office/thememl/2012/main" name="Office Theme" id="{2E142A2C-CD16-42D6-873A-C26D2A0506FA}" vid="{1BDDFF52-6CD6-40A5-AB3C-68EB2F1E4D0A}"/>
+    </a:ext>
+  </a:extLst>
+</a:theme>
 </file>